--- a/deck/ThaparPatiala_TEAM_FDBv3_ppt.pptx
+++ b/deck/ThaparPatiala_TEAM_FDBv3_ppt.pptx
@@ -202,9 +202,9 @@
           </c:dLbls>
           <c:cat>
             <c:multiLvlStrRef>
-              <c:f>Sheet1!$A$2:$A$6</c:f>
+              <c:f>Sheet1!$A$2:$A$8</c:f>
               <c:multiLvlStrCache>
-                <c:ptCount val="5"/>
+                <c:ptCount val="7"/>
                 <c:lvl>
                   <c:pt idx="0">
                     <c:v>5 clips · Orpheus TTS</c:v>
@@ -221,16 +221,22 @@
                   <c:pt idx="4">
                     <c:v>10 spread · with fixes</c:v>
                   </c:pt>
+                  <c:pt idx="5">
+                    <c:v>10 spread · gpt-oss-20b</c:v>
+                  </c:pt>
+                  <c:pt idx="6">
+                    <c:v>10 spread · 20b + STT-aware guard</c:v>
+                  </c:pt>
                 </c:lvl>
               </c:multiLvlStrCache>
             </c:multiLvlStrRef>
           </c:cat>
           <c:val>
             <c:numRef>
-              <c:f>Sheet1!$B$2:$B$6</c:f>
+              <c:f>Sheet1!$B$2:$B$8</c:f>
               <c:numCache>
                 <c:formatCode>General</c:formatCode>
-                <c:ptCount val="5"/>
+                <c:ptCount val="7"/>
                 <c:pt idx="0">
                   <c:v>80</c:v>
                 </c:pt>
@@ -245,6 +251,12 @@
                 </c:pt>
                 <c:pt idx="4">
                   <c:v>40</c:v>
+                </c:pt>
+                <c:pt idx="5">
+                  <c:v>60</c:v>
+                </c:pt>
+                <c:pt idx="6">
+                  <c:v>50</c:v>
                 </c:pt>
               </c:numCache>
             </c:numRef>
@@ -1137,6 +1149,8 @@
 5 clips · ablation (ours off): 5/5 · 5.0 s
 10 spread · before fixes: 3/10 · 6.1 s
 10 spread · with fixes: 4/10 · 6.8 s
+10 spread · gpt-oss-20b: 6/10 · 6.3 s
+10 spread · 20b + STT-aware guard: 5/10 · 5.6 s (1 clip lost to benchmark client crash)
 Full log: docs/FDB_RESULTS.md</a:t>
             </a:r>
             <a:endParaRPr lang="en-US" dirty="0"/>
@@ -3479,7 +3493,7 @@
                 <a:ea typeface="Calibri" pitchFamily="34" charset="-122"/>
                 <a:cs typeface="Calibri" pitchFamily="34" charset="-120"/>
               </a:rPr>
-              <a:t>Each call waits 0.3 s and runs only if the user is silent — otherwise “not executed, still speaking”. Identical (tool, args) runs once.</a:t>
+              <a:t>Each call waits 0.3 s and runs only if the user is silent and nothing they said is still in STT — else “not executed”. Identical (tool, args) runs once.</a:t>
             </a:r>
             <a:endParaRPr lang="en-US" sz="1300" dirty="0"/>
           </a:p>
@@ -3772,7 +3786,7 @@
                 <a:ea typeface="Calibri" pitchFamily="34" charset="-122"/>
                 <a:cs typeface="Calibri" pitchFamily="34" charset="-120"/>
               </a:rPr>
-              <a:t>A call issued while the user is still talking is deferred, not only one they resume inside the window.</a:t>
+              <a:t>A call is deferred while the user is talking, or while their last words are still being transcribed.</a:t>
             </a:r>
             <a:endParaRPr lang="en-US" sz="1300" dirty="0"/>
           </a:p>
@@ -4472,7 +4486,7 @@
                 <a:ea typeface="Calibri" pitchFamily="34" charset="-122"/>
                 <a:cs typeface="Calibri" pitchFamily="34" charset="-120"/>
               </a:rPr>
-              <a:t>5–10 clips per run. The same clip has flipped between pass and fail on replays.</a:t>
+              <a:t>5–10 clips per run. The same clip has flipped between pass and fail on replays. The 20b rows exist because 120b's daily quota was spent.</a:t>
             </a:r>
             <a:endParaRPr lang="en-US" sz="1300" dirty="0"/>
           </a:p>

--- a/deck/ThaparPatiala_TEAM_FDBv3_ppt.pptx
+++ b/deck/ThaparPatiala_TEAM_FDBv3_ppt.pptx
@@ -5063,7 +5063,7 @@
                 <a:ea typeface="Cambria" pitchFamily="34" charset="-122"/>
                 <a:cs typeface="Cambria" pitchFamily="34" charset="-120"/>
               </a:rPr>
-              <a:t>Extension: troubleshooting from a camera frame</a:t>
+              <a:t>Extension: troubleshooting through the camera</a:t>
             </a:r>
             <a:endParaRPr lang="en-US" sz="3000" dirty="0"/>
           </a:p>
@@ -5094,7 +5094,7 @@
               <a:buNone/>
             </a:pPr>
             <a:r>
-              <a:rPr lang="en-US" sz="1700" dirty="0">
+              <a:rPr lang="en-US" sz="1500" dirty="0">
                 <a:solidFill>
                   <a:srgbClr val="1F2328"/>
                 </a:solidFill>
@@ -5102,16 +5102,16 @@
                 <a:ea typeface="Calibri" pitchFamily="34" charset="-122"/>
                 <a:cs typeface="Calibri" pitchFamily="34" charset="-120"/>
               </a:rPr>
-              <a:t>The user shows the agent an appliance panel or a router’s LEDs; the agent reads the error code or LED pattern and looks it up.</a:t>
-            </a:r>
-            <a:endParaRPr lang="en-US" sz="1700" dirty="0"/>
-          </a:p>
-          <a:p>
-            <a:pPr indent="0" marL="0">
-              <a:buNone/>
-            </a:pPr>
-            <a:r>
-              <a:rPr lang="en-US" sz="1700" dirty="0">
+              <a:t>A separate live LiveKit agent (fdb/agent_extension.py): the user points their phone camera at a TV, router or washer and asks what's wrong. One tool reads the latest frame: error code, LED colour, or on-screen text.</a:t>
+            </a:r>
+            <a:endParaRPr lang="en-US" sz="1500" dirty="0"/>
+          </a:p>
+          <a:p>
+            <a:pPr indent="0" marL="0">
+              <a:buNone/>
+            </a:pPr>
+            <a:r>
+              <a:rPr lang="en-US" sz="1500" dirty="0">
                 <a:solidFill>
                   <a:srgbClr val="1F2328"/>
                 </a:solidFill>
@@ -5121,14 +5121,14 @@
               </a:rPr>
               <a:t> </a:t>
             </a:r>
-            <a:endParaRPr lang="en-US" sz="1700" dirty="0"/>
-          </a:p>
-          <a:p>
-            <a:pPr indent="0" marL="0">
-              <a:buNone/>
-            </a:pPr>
-            <a:r>
-              <a:rPr lang="en-US" sz="1700" dirty="0">
+            <a:endParaRPr lang="en-US" sz="1500" dirty="0"/>
+          </a:p>
+          <a:p>
+            <a:pPr indent="0" marL="0">
+              <a:buNone/>
+            </a:pPr>
+            <a:r>
+              <a:rPr lang="en-US" sz="1500" dirty="0">
                 <a:solidFill>
                   <a:srgbClr val="1F2328"/>
                 </a:solidFill>
@@ -5136,16 +5136,16 @@
                 <a:ea typeface="Calibri" pitchFamily="34" charset="-122"/>
                 <a:cs typeface="Calibri" pitchFamily="34" charset="-120"/>
               </a:rPr>
-              <a:t>When the frame can't be decided (blur, two plausible LEDs), it asks instead of guessing, and nothing is dispatched until the user answers.</a:t>
-            </a:r>
-            <a:endParaRPr lang="en-US" sz="1700" dirty="0"/>
-          </a:p>
-          <a:p>
-            <a:pPr indent="0" marL="0">
-              <a:buNone/>
-            </a:pPr>
-            <a:r>
-              <a:rPr lang="en-US" sz="1700" dirty="0">
+              <a:t>Three outcomes only: a diagnosis with the manual's steps, a question naming both candidates, or a request for a better shot. It asks rather than guesses.</a:t>
+            </a:r>
+            <a:endParaRPr lang="en-US" sz="1500" dirty="0"/>
+          </a:p>
+          <a:p>
+            <a:pPr indent="0" marL="0">
+              <a:buNone/>
+            </a:pPr>
+            <a:r>
+              <a:rPr lang="en-US" sz="1500" dirty="0">
                 <a:solidFill>
                   <a:srgbClr val="1F2328"/>
                 </a:solidFill>
@@ -5155,14 +5155,14 @@
               </a:rPr>
               <a:t> </a:t>
             </a:r>
-            <a:endParaRPr lang="en-US" sz="1700" dirty="0"/>
-          </a:p>
-          <a:p>
-            <a:pPr indent="0" marL="0">
-              <a:buNone/>
-            </a:pPr>
-            <a:r>
-              <a:rPr lang="en-US" sz="1700" b="1" dirty="0">
+            <a:endParaRPr lang="en-US" sz="1500" dirty="0"/>
+          </a:p>
+          <a:p>
+            <a:pPr indent="0" marL="0">
+              <a:buNone/>
+            </a:pPr>
+            <a:r>
+              <a:rPr lang="en-US" sz="1500" b="1" dirty="0">
                 <a:solidFill>
                   <a:srgbClr val="1F2328"/>
                 </a:solidFill>
@@ -5170,9 +5170,9 @@
                 <a:ea typeface="Calibri" pitchFamily="34" charset="-122"/>
                 <a:cs typeface="Calibri" pitchFamily="34" charset="-120"/>
               </a:rPr>
-              <a:t>Being built by a teammate on branch extension-camera, on top of the perception code in parley/multimodal/. It is not part of the FDB-v3 scores.</a:t>
-            </a:r>
-            <a:endParaRPr lang="en-US" sz="1700" dirty="0"/>
+              <a:t>Real phone frames, held out: 5/9 diagnosed (every real 'No Signal' TV), 4 abstained, 0 wrong. The colour model was trained on synthetic frames only; routers and washers on camera are not yet proven. Not part of the FDB-v3 scores.</a:t>
+            </a:r>
+            <a:endParaRPr lang="en-US" sz="1500" dirty="0"/>
           </a:p>
         </p:txBody>
       </p:sp>
@@ -5270,7 +5270,7 @@
                 <a:ea typeface="Calibri" pitchFamily="34" charset="-122"/>
                 <a:cs typeface="Calibri" pitchFamily="34" charset="-120"/>
               </a:rPr>
-              <a:t>1. Photo of a washing-machine panel → error code read → fix looked up</a:t>
+              <a:t>1. Camera away from the device → it asks to see it, no guess</a:t>
             </a:r>
             <a:endParaRPr lang="en-US" sz="1400" dirty="0"/>
           </a:p>
@@ -5287,7 +5287,7 @@
                 <a:ea typeface="Calibri" pitchFamily="34" charset="-122"/>
                 <a:cs typeface="Calibri" pitchFamily="34" charset="-120"/>
               </a:rPr>
-              <a:t>2. Router with two LEDs lit → “the WAN LED or the power LED?”</a:t>
+              <a:t>2. A real TV showing 'No Signal' → diagnosed from the screen text, fix read out</a:t>
             </a:r>
             <a:endParaRPr lang="en-US" sz="1400" dirty="0"/>
           </a:p>
@@ -5304,7 +5304,7 @@
                 <a:ea typeface="Calibri" pitchFamily="34" charset="-122"/>
                 <a:cs typeface="Calibri" pitchFamily="34" charset="-120"/>
               </a:rPr>
-              <a:t>3. The user interrupts mid-answer; the plan updates</a:t>
+              <a:t>3. Groq's free voice quota runs out → offline Piper voice takes over, no drop</a:t>
             </a:r>
             <a:endParaRPr lang="en-US" sz="1400" dirty="0"/>
           </a:p>
